--- a/diagrams/articles/e71b12d2e9ba33-figures.pptx
+++ b/diagrams/articles/e71b12d2e9ba33-figures.pptx
@@ -14822,7 +14822,7 @@
                 <a:ea typeface="メイリオ"/>
                 <a:cs typeface="メイリオ"/>
               </a:rPr>
-              <a:t>Software stack for collectives on Trainium</a:t>
+              <a:t>From all_reduce() to the wire</a:t>
             </a:r>
           </a:p>
         </p:txBody>
@@ -14863,7 +14863,7 @@
                 <a:ea typeface="メイリオ"/>
                 <a:cs typeface="メイリオ"/>
               </a:rPr>
-              <a:t>Neuron SDK 2.32.0 (2026-08-17)</a:t>
+              <a:t>What each layer does, and when it works</a:t>
             </a:r>
           </a:p>
         </p:txBody>
@@ -14876,8 +14876,8 @@
         </p:nvSpPr>
         <p:spPr>
           <a:xfrm>
-            <a:off x="409575" y="1143000"/>
-            <a:ext cx="7239000" cy="590550"/>
+            <a:off x="409575" y="1066800"/>
+            <a:ext cx="7524750" cy="552450"/>
           </a:xfrm>
           <a:prstGeom prst="roundRect">
             <a:avLst>
@@ -14924,587 +14924,8 @@
         </p:nvSpPr>
         <p:spPr>
           <a:xfrm>
-            <a:off x="581025" y="1143000"/>
-            <a:ext cx="3143250" cy="590550"/>
-          </a:xfrm>
-          <a:prstGeom prst="rect">
-            <a:avLst/>
-          </a:prstGeom>
-          <a:noFill/>
-        </p:spPr>
-        <p:txBody>
-          <a:bodyPr wrap="square" lIns="0" rIns="0" tIns="0" bIns="0" anchor="ctr">
-            <a:spAutoFit/>
-          </a:bodyPr>
-          <a:lstStyle/>
-          <a:p>
-            <a:pPr algn="l">
-              <a:lnSpc>
-                <a:spcPct val="122000"/>
-              </a:lnSpc>
-            </a:pPr>
-            <a:r>
-              <a:rPr sz="1800" b="1">
-                <a:solidFill>
-                  <a:srgbClr val="F5F5F8"/>
-                </a:solidFill>
-                <a:latin typeface="Amazon Ember"/>
-                <a:ea typeface="メイリオ"/>
-                <a:cs typeface="メイリオ"/>
-              </a:rPr>
-              <a:t>Framework</a:t>
-            </a:r>
-          </a:p>
-        </p:txBody>
-      </p:sp>
-      <p:sp>
-        <p:nvSpPr>
-          <p:cNvPr id="6" name="TextBox 5"/>
-          <p:cNvSpPr txBox="1"/>
-          <p:nvPr/>
-        </p:nvSpPr>
-        <p:spPr>
-          <a:xfrm>
-            <a:off x="3743325" y="1143000"/>
-            <a:ext cx="3810000" cy="590550"/>
-          </a:xfrm>
-          <a:prstGeom prst="rect">
-            <a:avLst/>
-          </a:prstGeom>
-          <a:noFill/>
-        </p:spPr>
-        <p:txBody>
-          <a:bodyPr wrap="square" lIns="0" rIns="0" tIns="0" bIns="0" anchor="ctr">
-            <a:spAutoFit/>
-          </a:bodyPr>
-          <a:lstStyle/>
-          <a:p>
-            <a:pPr algn="l">
-              <a:lnSpc>
-                <a:spcPct val="122000"/>
-              </a:lnSpc>
-            </a:pPr>
-            <a:r>
-              <a:rPr sz="1500" b="0">
-                <a:solidFill>
-                  <a:srgbClr val="96969E"/>
-                </a:solidFill>
-                <a:latin typeface="Amazon Ember"/>
-                <a:ea typeface="メイリオ"/>
-                <a:cs typeface="メイリオ"/>
-              </a:rPr>
-              <a:t>PyTorch  |  JAX  |  vLLM Neuron</a:t>
-            </a:r>
-          </a:p>
-        </p:txBody>
-      </p:sp>
-      <p:sp>
-        <p:nvSpPr>
-          <p:cNvPr id="7" name="Rounded Rectangle 6"/>
-          <p:cNvSpPr/>
-          <p:nvPr/>
-        </p:nvSpPr>
-        <p:spPr>
-          <a:xfrm>
-            <a:off x="7877175" y="1257300"/>
-            <a:ext cx="1905000" cy="361950"/>
-          </a:xfrm>
-          <a:prstGeom prst="roundRect">
-            <a:avLst>
-              <a:gd name="adj" fmla="val 30000"/>
-            </a:avLst>
-          </a:prstGeom>
-          <a:solidFill>
-            <a:srgbClr val="124022"/>
-          </a:solidFill>
-          <a:ln w="12700">
-            <a:solidFill>
-              <a:srgbClr val="3BD16F"/>
-            </a:solidFill>
-          </a:ln>
-          <a:effectLst/>
-        </p:spPr>
-        <p:style>
-          <a:lnRef idx="1">
-            <a:schemeClr val="accent1"/>
-          </a:lnRef>
-          <a:fillRef idx="3">
-            <a:schemeClr val="accent1"/>
-          </a:fillRef>
-          <a:effectRef idx="2">
-            <a:schemeClr val="accent1"/>
-          </a:effectRef>
-          <a:fontRef idx="minor">
-            <a:schemeClr val="lt1"/>
-          </a:fontRef>
-        </p:style>
-        <p:txBody>
-          <a:bodyPr rtlCol="0" anchor="ctr" wrap="square" lIns="19050" rIns="19050" tIns="19050" bIns="19050"/>
-          <a:lstStyle/>
-          <a:p>
-            <a:pPr algn="ctr">
-              <a:lnSpc>
-                <a:spcPct val="122000"/>
-              </a:lnSpc>
-            </a:pPr>
-            <a:r>
-              <a:rPr sz="1400" b="1">
-                <a:solidFill>
-                  <a:srgbClr val="F5F5F8"/>
-                </a:solidFill>
-                <a:latin typeface="Amazon Ember"/>
-                <a:ea typeface="メイリオ"/>
-                <a:cs typeface="メイリオ"/>
-              </a:rPr>
-              <a:t>pip</a:t>
-            </a:r>
-          </a:p>
-        </p:txBody>
-      </p:sp>
-      <p:sp>
-        <p:nvSpPr>
-          <p:cNvPr id="8" name="Rounded Rectangle 7"/>
-          <p:cNvSpPr/>
-          <p:nvPr/>
-        </p:nvSpPr>
-        <p:spPr>
-          <a:xfrm>
-            <a:off x="409575" y="1847850"/>
-            <a:ext cx="7239000" cy="590550"/>
-          </a:xfrm>
-          <a:prstGeom prst="roundRect">
-            <a:avLst>
-              <a:gd name="adj" fmla="val 8000"/>
-            </a:avLst>
-          </a:prstGeom>
-          <a:solidFill>
-            <a:srgbClr val="161A1E"/>
-          </a:solidFill>
-          <a:ln w="19050">
-            <a:solidFill>
-              <a:srgbClr val="2896F0"/>
-            </a:solidFill>
-          </a:ln>
-          <a:effectLst/>
-        </p:spPr>
-        <p:style>
-          <a:lnRef idx="1">
-            <a:schemeClr val="accent1"/>
-          </a:lnRef>
-          <a:fillRef idx="3">
-            <a:schemeClr val="accent1"/>
-          </a:fillRef>
-          <a:effectRef idx="2">
-            <a:schemeClr val="accent1"/>
-          </a:effectRef>
-          <a:fontRef idx="minor">
-            <a:schemeClr val="lt1"/>
-          </a:fontRef>
-        </p:style>
-        <p:txBody>
-          <a:bodyPr rtlCol="0" anchor="ctr"/>
-          <a:lstStyle/>
-          <a:p>
-            <a:pPr algn="ctr"/>
-          </a:p>
-        </p:txBody>
-      </p:sp>
-      <p:sp>
-        <p:nvSpPr>
-          <p:cNvPr id="9" name="TextBox 8"/>
-          <p:cNvSpPr txBox="1"/>
-          <p:nvPr/>
-        </p:nvSpPr>
-        <p:spPr>
-          <a:xfrm>
-            <a:off x="581025" y="1847850"/>
-            <a:ext cx="3143250" cy="590550"/>
-          </a:xfrm>
-          <a:prstGeom prst="rect">
-            <a:avLst/>
-          </a:prstGeom>
-          <a:noFill/>
-        </p:spPr>
-        <p:txBody>
-          <a:bodyPr wrap="square" lIns="0" rIns="0" tIns="0" bIns="0" anchor="ctr">
-            <a:spAutoFit/>
-          </a:bodyPr>
-          <a:lstStyle/>
-          <a:p>
-            <a:pPr algn="l">
-              <a:lnSpc>
-                <a:spcPct val="122000"/>
-              </a:lnSpc>
-            </a:pPr>
-            <a:r>
-              <a:rPr sz="1800" b="1">
-                <a:solidFill>
-                  <a:srgbClr val="F5F5F8"/>
-                </a:solidFill>
-                <a:latin typeface="Amazon Ember"/>
-                <a:ea typeface="メイリオ"/>
-                <a:cs typeface="メイリオ"/>
-              </a:rPr>
-              <a:t>aws-neuronx-collectives</a:t>
-            </a:r>
-          </a:p>
-        </p:txBody>
-      </p:sp>
-      <p:sp>
-        <p:nvSpPr>
-          <p:cNvPr id="10" name="TextBox 9"/>
-          <p:cNvSpPr txBox="1"/>
-          <p:nvPr/>
-        </p:nvSpPr>
-        <p:spPr>
-          <a:xfrm>
-            <a:off x="3743325" y="1847850"/>
-            <a:ext cx="3810000" cy="590550"/>
-          </a:xfrm>
-          <a:prstGeom prst="rect">
-            <a:avLst/>
-          </a:prstGeom>
-          <a:noFill/>
-        </p:spPr>
-        <p:txBody>
-          <a:bodyPr wrap="square" lIns="0" rIns="0" tIns="0" bIns="0" anchor="ctr">
-            <a:spAutoFit/>
-          </a:bodyPr>
-          <a:lstStyle/>
-          <a:p>
-            <a:pPr algn="l">
-              <a:lnSpc>
-                <a:spcPct val="122000"/>
-              </a:lnSpc>
-            </a:pPr>
-            <a:r>
-              <a:rPr sz="1500" b="0">
-                <a:solidFill>
-                  <a:srgbClr val="96969E"/>
-                </a:solidFill>
-                <a:latin typeface="Amazon Ember"/>
-                <a:ea typeface="メイリオ"/>
-                <a:cs typeface="メイリオ"/>
-              </a:rPr>
-              <a:t>Collective algorithms, OFI plugin</a:t>
-            </a:r>
-          </a:p>
-        </p:txBody>
-      </p:sp>
-      <p:sp>
-        <p:nvSpPr>
-          <p:cNvPr id="11" name="Rounded Rectangle 10"/>
-          <p:cNvSpPr/>
-          <p:nvPr/>
-        </p:nvSpPr>
-        <p:spPr>
-          <a:xfrm>
-            <a:off x="7877175" y="1962150"/>
-            <a:ext cx="1905000" cy="361950"/>
-          </a:xfrm>
-          <a:prstGeom prst="roundRect">
-            <a:avLst>
-              <a:gd name="adj" fmla="val 30000"/>
-            </a:avLst>
-          </a:prstGeom>
-          <a:solidFill>
-            <a:srgbClr val="102C48"/>
-          </a:solidFill>
-          <a:ln w="12700">
-            <a:solidFill>
-              <a:srgbClr val="2896F0"/>
-            </a:solidFill>
-          </a:ln>
-          <a:effectLst/>
-        </p:spPr>
-        <p:style>
-          <a:lnRef idx="1">
-            <a:schemeClr val="accent1"/>
-          </a:lnRef>
-          <a:fillRef idx="3">
-            <a:schemeClr val="accent1"/>
-          </a:fillRef>
-          <a:effectRef idx="2">
-            <a:schemeClr val="accent1"/>
-          </a:effectRef>
-          <a:fontRef idx="minor">
-            <a:schemeClr val="lt1"/>
-          </a:fontRef>
-        </p:style>
-        <p:txBody>
-          <a:bodyPr rtlCol="0" anchor="ctr" wrap="square" lIns="19050" rIns="19050" tIns="19050" bIns="19050"/>
-          <a:lstStyle/>
-          <a:p>
-            <a:pPr algn="ctr">
-              <a:lnSpc>
-                <a:spcPct val="122000"/>
-              </a:lnSpc>
-            </a:pPr>
-            <a:r>
-              <a:rPr sz="1400" b="1">
-                <a:solidFill>
-                  <a:srgbClr val="F5F5F8"/>
-                </a:solidFill>
-                <a:latin typeface="Amazon Ember"/>
-                <a:ea typeface="メイリオ"/>
-                <a:cs typeface="メイリオ"/>
-              </a:rPr>
-              <a:t>apt  2.34.10</a:t>
-            </a:r>
-          </a:p>
-        </p:txBody>
-      </p:sp>
-      <p:sp>
-        <p:nvSpPr>
-          <p:cNvPr id="12" name="Rounded Rectangle 11"/>
-          <p:cNvSpPr/>
-          <p:nvPr/>
-        </p:nvSpPr>
-        <p:spPr>
-          <a:xfrm>
-            <a:off x="409575" y="2552700"/>
-            <a:ext cx="7239000" cy="590550"/>
-          </a:xfrm>
-          <a:prstGeom prst="roundRect">
-            <a:avLst>
-              <a:gd name="adj" fmla="val 8000"/>
-            </a:avLst>
-          </a:prstGeom>
-          <a:solidFill>
-            <a:srgbClr val="161A1E"/>
-          </a:solidFill>
-          <a:ln w="19050">
-            <a:solidFill>
-              <a:srgbClr val="2896F0"/>
-            </a:solidFill>
-          </a:ln>
-          <a:effectLst/>
-        </p:spPr>
-        <p:style>
-          <a:lnRef idx="1">
-            <a:schemeClr val="accent1"/>
-          </a:lnRef>
-          <a:fillRef idx="3">
-            <a:schemeClr val="accent1"/>
-          </a:fillRef>
-          <a:effectRef idx="2">
-            <a:schemeClr val="accent1"/>
-          </a:effectRef>
-          <a:fontRef idx="minor">
-            <a:schemeClr val="lt1"/>
-          </a:fontRef>
-        </p:style>
-        <p:txBody>
-          <a:bodyPr rtlCol="0" anchor="ctr"/>
-          <a:lstStyle/>
-          <a:p>
-            <a:pPr algn="ctr"/>
-          </a:p>
-        </p:txBody>
-      </p:sp>
-      <p:sp>
-        <p:nvSpPr>
-          <p:cNvPr id="13" name="TextBox 12"/>
-          <p:cNvSpPr txBox="1"/>
-          <p:nvPr/>
-        </p:nvSpPr>
-        <p:spPr>
-          <a:xfrm>
-            <a:off x="581025" y="2552700"/>
-            <a:ext cx="3143250" cy="590550"/>
-          </a:xfrm>
-          <a:prstGeom prst="rect">
-            <a:avLst/>
-          </a:prstGeom>
-          <a:noFill/>
-        </p:spPr>
-        <p:txBody>
-          <a:bodyPr wrap="square" lIns="0" rIns="0" tIns="0" bIns="0" anchor="ctr">
-            <a:spAutoFit/>
-          </a:bodyPr>
-          <a:lstStyle/>
-          <a:p>
-            <a:pPr algn="l">
-              <a:lnSpc>
-                <a:spcPct val="122000"/>
-              </a:lnSpc>
-            </a:pPr>
-            <a:r>
-              <a:rPr sz="1800" b="1">
-                <a:solidFill>
-                  <a:srgbClr val="F5F5F8"/>
-                </a:solidFill>
-                <a:latin typeface="Amazon Ember"/>
-                <a:ea typeface="メイリオ"/>
-                <a:cs typeface="メイリオ"/>
-              </a:rPr>
-              <a:t>aws-neuronx-runtime-lib</a:t>
-            </a:r>
-          </a:p>
-        </p:txBody>
-      </p:sp>
-      <p:sp>
-        <p:nvSpPr>
-          <p:cNvPr id="14" name="TextBox 13"/>
-          <p:cNvSpPr txBox="1"/>
-          <p:nvPr/>
-        </p:nvSpPr>
-        <p:spPr>
-          <a:xfrm>
-            <a:off x="3743325" y="2552700"/>
-            <a:ext cx="3810000" cy="590550"/>
-          </a:xfrm>
-          <a:prstGeom prst="rect">
-            <a:avLst/>
-          </a:prstGeom>
-          <a:noFill/>
-        </p:spPr>
-        <p:txBody>
-          <a:bodyPr wrap="square" lIns="0" rIns="0" tIns="0" bIns="0" anchor="ctr">
-            <a:spAutoFit/>
-          </a:bodyPr>
-          <a:lstStyle/>
-          <a:p>
-            <a:pPr algn="l">
-              <a:lnSpc>
-                <a:spcPct val="122000"/>
-              </a:lnSpc>
-            </a:pPr>
-            <a:r>
-              <a:rPr sz="1500" b="0">
-                <a:solidFill>
-                  <a:srgbClr val="96969E"/>
-                </a:solidFill>
-                <a:latin typeface="Amazon Ember"/>
-                <a:ea typeface="メイリオ"/>
-                <a:cs typeface="メイリオ"/>
-              </a:rPr>
-              <a:t>Loads NEFF, rewrites PTC2</a:t>
-            </a:r>
-          </a:p>
-        </p:txBody>
-      </p:sp>
-      <p:sp>
-        <p:nvSpPr>
-          <p:cNvPr id="15" name="Rounded Rectangle 14"/>
-          <p:cNvSpPr/>
-          <p:nvPr/>
-        </p:nvSpPr>
-        <p:spPr>
-          <a:xfrm>
-            <a:off x="7877175" y="2667000"/>
-            <a:ext cx="1905000" cy="361950"/>
-          </a:xfrm>
-          <a:prstGeom prst="roundRect">
-            <a:avLst>
-              <a:gd name="adj" fmla="val 30000"/>
-            </a:avLst>
-          </a:prstGeom>
-          <a:solidFill>
-            <a:srgbClr val="102C48"/>
-          </a:solidFill>
-          <a:ln w="12700">
-            <a:solidFill>
-              <a:srgbClr val="2896F0"/>
-            </a:solidFill>
-          </a:ln>
-          <a:effectLst/>
-        </p:spPr>
-        <p:style>
-          <a:lnRef idx="1">
-            <a:schemeClr val="accent1"/>
-          </a:lnRef>
-          <a:fillRef idx="3">
-            <a:schemeClr val="accent1"/>
-          </a:fillRef>
-          <a:effectRef idx="2">
-            <a:schemeClr val="accent1"/>
-          </a:effectRef>
-          <a:fontRef idx="minor">
-            <a:schemeClr val="lt1"/>
-          </a:fontRef>
-        </p:style>
-        <p:txBody>
-          <a:bodyPr rtlCol="0" anchor="ctr" wrap="square" lIns="19050" rIns="19050" tIns="19050" bIns="19050"/>
-          <a:lstStyle/>
-          <a:p>
-            <a:pPr algn="ctr">
-              <a:lnSpc>
-                <a:spcPct val="122000"/>
-              </a:lnSpc>
-            </a:pPr>
-            <a:r>
-              <a:rPr sz="1400" b="1">
-                <a:solidFill>
-                  <a:srgbClr val="F5F5F8"/>
-                </a:solidFill>
-                <a:latin typeface="Amazon Ember"/>
-                <a:ea typeface="メイリオ"/>
-                <a:cs typeface="メイリオ"/>
-              </a:rPr>
-              <a:t>apt  2.34.10</a:t>
-            </a:r>
-          </a:p>
-        </p:txBody>
-      </p:sp>
-      <p:sp>
-        <p:nvSpPr>
-          <p:cNvPr id="16" name="Rounded Rectangle 15"/>
-          <p:cNvSpPr/>
-          <p:nvPr/>
-        </p:nvSpPr>
-        <p:spPr>
-          <a:xfrm>
-            <a:off x="409575" y="3257550"/>
-            <a:ext cx="3524250" cy="590550"/>
-          </a:xfrm>
-          <a:prstGeom prst="roundRect">
-            <a:avLst>
-              <a:gd name="adj" fmla="val 8000"/>
-            </a:avLst>
-          </a:prstGeom>
-          <a:solidFill>
-            <a:srgbClr val="161A1E"/>
-          </a:solidFill>
-          <a:ln w="19050">
-            <a:solidFill>
-              <a:srgbClr val="343840"/>
-            </a:solidFill>
-          </a:ln>
-          <a:effectLst/>
-        </p:spPr>
-        <p:style>
-          <a:lnRef idx="1">
-            <a:schemeClr val="accent1"/>
-          </a:lnRef>
-          <a:fillRef idx="3">
-            <a:schemeClr val="accent1"/>
-          </a:fillRef>
-          <a:effectRef idx="2">
-            <a:schemeClr val="accent1"/>
-          </a:effectRef>
-          <a:fontRef idx="minor">
-            <a:schemeClr val="lt1"/>
-          </a:fontRef>
-        </p:style>
-        <p:txBody>
-          <a:bodyPr rtlCol="0" anchor="ctr"/>
-          <a:lstStyle/>
-          <a:p>
-            <a:pPr algn="ctr"/>
-          </a:p>
-        </p:txBody>
-      </p:sp>
-      <p:sp>
-        <p:nvSpPr>
-          <p:cNvPr id="17" name="TextBox 16"/>
-          <p:cNvSpPr txBox="1"/>
-          <p:nvPr/>
-        </p:nvSpPr>
-        <p:spPr>
-          <a:xfrm>
-            <a:off x="542925" y="3295650"/>
-            <a:ext cx="3333750" cy="285750"/>
+            <a:off x="561975" y="1066800"/>
+            <a:ext cx="2857500" cy="552450"/>
           </a:xfrm>
           <a:prstGeom prst="rect">
             <a:avLst/>
@@ -15531,21 +14952,21 @@
                 <a:ea typeface="メイリオ"/>
                 <a:cs typeface="メイリオ"/>
               </a:rPr>
-              <a:t>aws-neuronx-dkms</a:t>
+              <a:t>Framework</a:t>
             </a:r>
           </a:p>
         </p:txBody>
       </p:sp>
       <p:sp>
         <p:nvSpPr>
-          <p:cNvPr id="18" name="TextBox 17"/>
+          <p:cNvPr id="6" name="TextBox 5"/>
           <p:cNvSpPr txBox="1"/>
           <p:nvPr/>
         </p:nvSpPr>
         <p:spPr>
           <a:xfrm>
-            <a:off x="542925" y="3562350"/>
-            <a:ext cx="3333750" cy="247650"/>
+            <a:off x="3457575" y="1066800"/>
+            <a:ext cx="4381500" cy="552450"/>
           </a:xfrm>
           <a:prstGeom prst="rect">
             <a:avLst/>
@@ -15564,7 +14985,7 @@
               </a:lnSpc>
             </a:pPr>
             <a:r>
-              <a:rPr sz="1300" b="0">
+              <a:rPr sz="1400" b="0">
                 <a:solidFill>
                   <a:srgbClr val="96969E"/>
                 </a:solidFill>
@@ -15572,62 +14993,25 @@
                 <a:ea typeface="メイリオ"/>
                 <a:cs typeface="メイリオ"/>
               </a:rPr>
-              <a:t>Neuron driver</a:t>
+              <a:t>your code calls all_reduce / all_gather</a:t>
             </a:r>
           </a:p>
         </p:txBody>
       </p:sp>
-      <p:cxnSp>
-        <p:nvCxnSpPr>
-          <p:cNvPr id="19" name="Connector 18"/>
-          <p:cNvCxnSpPr/>
-          <p:nvPr/>
-        </p:nvCxnSpPr>
-        <p:spPr>
-          <a:xfrm>
-            <a:off x="2171700" y="3848100"/>
-            <a:ext cx="0" cy="228600"/>
-          </a:xfrm>
-          <a:prstGeom prst="line">
-            <a:avLst/>
-          </a:prstGeom>
-          <a:ln w="19050">
-            <a:solidFill>
-              <a:srgbClr val="96969E"/>
-            </a:solidFill>
-            <a:tailEnd type="triangle" w="med" len="med"/>
-          </a:ln>
-          <a:effectLst/>
-        </p:spPr>
-        <p:style>
-          <a:lnRef idx="2">
-            <a:schemeClr val="accent1"/>
-          </a:lnRef>
-          <a:fillRef idx="0">
-            <a:schemeClr val="accent1"/>
-          </a:fillRef>
-          <a:effectRef idx="1">
-            <a:schemeClr val="accent1"/>
-          </a:effectRef>
-          <a:fontRef idx="minor">
-            <a:schemeClr val="tx1"/>
-          </a:fontRef>
-        </p:style>
-      </p:cxnSp>
-      <p:sp>
-        <p:nvSpPr>
-          <p:cNvPr id="20" name="Rounded Rectangle 19"/>
-          <p:cNvSpPr/>
-          <p:nvPr/>
-        </p:nvSpPr>
-        <p:spPr>
-          <a:xfrm>
-            <a:off x="409575" y="4076700"/>
-            <a:ext cx="3524250" cy="552450"/>
+      <p:sp>
+        <p:nvSpPr>
+          <p:cNvPr id="7" name="Rounded Rectangle 6"/>
+          <p:cNvSpPr/>
+          <p:nvPr/>
+        </p:nvSpPr>
+        <p:spPr>
+          <a:xfrm>
+            <a:off x="8124825" y="1181100"/>
+            <a:ext cx="1809750" cy="323850"/>
           </a:xfrm>
           <a:prstGeom prst="roundRect">
             <a:avLst>
-              <a:gd name="adj" fmla="val 8000"/>
+              <a:gd name="adj" fmla="val 30000"/>
             </a:avLst>
           </a:prstGeom>
           <a:solidFill>
@@ -15635,7 +15019,7 @@
           </a:solidFill>
           <a:ln w="12700">
             <a:solidFill>
-              <a:srgbClr val="24A046"/>
+              <a:srgbClr val="3BD16F"/>
             </a:solidFill>
           </a:ln>
           <a:effectLst/>
@@ -15664,7 +15048,7 @@
               </a:lnSpc>
             </a:pPr>
             <a:r>
-              <a:rPr sz="1600" b="1">
+              <a:rPr sz="1300" b="1">
                 <a:solidFill>
                   <a:srgbClr val="F5F5F8"/>
                 </a:solidFill>
@@ -15672,21 +15056,58 @@
                 <a:ea typeface="メイリオ"/>
                 <a:cs typeface="メイリオ"/>
               </a:rPr>
-              <a:t>Trainium chips + NeuronLink</a:t>
+              <a:t>you call it</a:t>
             </a:r>
           </a:p>
         </p:txBody>
       </p:sp>
-      <p:sp>
-        <p:nvSpPr>
-          <p:cNvPr id="21" name="Rounded Rectangle 20"/>
-          <p:cNvSpPr/>
-          <p:nvPr/>
-        </p:nvSpPr>
-        <p:spPr>
-          <a:xfrm>
-            <a:off x="4124325" y="3257550"/>
-            <a:ext cx="3524250" cy="590550"/>
+      <p:cxnSp>
+        <p:nvCxnSpPr>
+          <p:cNvPr id="8" name="Connector 7"/>
+          <p:cNvCxnSpPr/>
+          <p:nvPr/>
+        </p:nvCxnSpPr>
+        <p:spPr>
+          <a:xfrm>
+            <a:off x="4171950" y="1619250"/>
+            <a:ext cx="0" cy="114300"/>
+          </a:xfrm>
+          <a:prstGeom prst="line">
+            <a:avLst/>
+          </a:prstGeom>
+          <a:ln w="19050">
+            <a:solidFill>
+              <a:srgbClr val="96969E"/>
+            </a:solidFill>
+            <a:tailEnd type="triangle" w="med" len="med"/>
+          </a:ln>
+          <a:effectLst/>
+        </p:spPr>
+        <p:style>
+          <a:lnRef idx="2">
+            <a:schemeClr val="accent1"/>
+          </a:lnRef>
+          <a:fillRef idx="0">
+            <a:schemeClr val="accent1"/>
+          </a:fillRef>
+          <a:effectRef idx="1">
+            <a:schemeClr val="accent1"/>
+          </a:effectRef>
+          <a:fontRef idx="minor">
+            <a:schemeClr val="tx1"/>
+          </a:fontRef>
+        </p:style>
+      </p:cxnSp>
+      <p:sp>
+        <p:nvSpPr>
+          <p:cNvPr id="9" name="Rounded Rectangle 8"/>
+          <p:cNvSpPr/>
+          <p:nvPr/>
+        </p:nvSpPr>
+        <p:spPr>
+          <a:xfrm>
+            <a:off x="409575" y="1733550"/>
+            <a:ext cx="7524750" cy="552450"/>
           </a:xfrm>
           <a:prstGeom prst="roundRect">
             <a:avLst>
@@ -15698,7 +15119,7 @@
           </a:solidFill>
           <a:ln w="19050">
             <a:solidFill>
-              <a:srgbClr val="343840"/>
+              <a:srgbClr val="24A046"/>
             </a:solidFill>
           </a:ln>
           <a:effectLst/>
@@ -15727,14 +15148,14 @@
       </p:sp>
       <p:sp>
         <p:nvSpPr>
-          <p:cNvPr id="22" name="TextBox 21"/>
+          <p:cNvPr id="10" name="TextBox 9"/>
           <p:cNvSpPr txBox="1"/>
           <p:nvPr/>
         </p:nvSpPr>
         <p:spPr>
           <a:xfrm>
-            <a:off x="4257675" y="3295650"/>
-            <a:ext cx="3333750" cy="285750"/>
+            <a:off x="561975" y="1733550"/>
+            <a:ext cx="2857500" cy="552450"/>
           </a:xfrm>
           <a:prstGeom prst="rect">
             <a:avLst/>
@@ -15761,21 +15182,21 @@
                 <a:ea typeface="メイリオ"/>
                 <a:cs typeface="メイリオ"/>
               </a:rPr>
-              <a:t>EFA software</a:t>
+              <a:t>Neuron compiler</a:t>
             </a:r>
           </a:p>
         </p:txBody>
       </p:sp>
       <p:sp>
         <p:nvSpPr>
-          <p:cNvPr id="23" name="TextBox 22"/>
+          <p:cNvPr id="11" name="TextBox 10"/>
           <p:cNvSpPr txBox="1"/>
           <p:nvPr/>
         </p:nvSpPr>
         <p:spPr>
           <a:xfrm>
-            <a:off x="4257675" y="3562350"/>
-            <a:ext cx="3333750" cy="247650"/>
+            <a:off x="3457575" y="1733550"/>
+            <a:ext cx="4381500" cy="552450"/>
           </a:xfrm>
           <a:prstGeom prst="rect">
             <a:avLst/>
@@ -15794,7 +15215,7 @@
               </a:lnSpc>
             </a:pPr>
             <a:r>
-              <a:rPr sz="1300" b="0">
+              <a:rPr sz="1400" b="0">
                 <a:solidFill>
                   <a:srgbClr val="96969E"/>
                 </a:solidFill>
@@ -15802,21 +15223,84 @@
                 <a:ea typeface="メイリオ"/>
                 <a:cs typeface="メイリオ"/>
               </a:rPr>
-              <a:t>EFA driver, libfabric, rdma-core</a:t>
+              <a:t>builds the NEFF; puts a CC trigger (PTC2) at each collective</a:t>
+            </a:r>
+          </a:p>
+        </p:txBody>
+      </p:sp>
+      <p:sp>
+        <p:nvSpPr>
+          <p:cNvPr id="12" name="Rounded Rectangle 11"/>
+          <p:cNvSpPr/>
+          <p:nvPr/>
+        </p:nvSpPr>
+        <p:spPr>
+          <a:xfrm>
+            <a:off x="8124825" y="1847850"/>
+            <a:ext cx="1809750" cy="323850"/>
+          </a:xfrm>
+          <a:prstGeom prst="roundRect">
+            <a:avLst>
+              <a:gd name="adj" fmla="val 30000"/>
+            </a:avLst>
+          </a:prstGeom>
+          <a:solidFill>
+            <a:srgbClr val="124022"/>
+          </a:solidFill>
+          <a:ln w="12700">
+            <a:solidFill>
+              <a:srgbClr val="3BD16F"/>
+            </a:solidFill>
+          </a:ln>
+          <a:effectLst/>
+        </p:spPr>
+        <p:style>
+          <a:lnRef idx="1">
+            <a:schemeClr val="accent1"/>
+          </a:lnRef>
+          <a:fillRef idx="3">
+            <a:schemeClr val="accent1"/>
+          </a:fillRef>
+          <a:effectRef idx="2">
+            <a:schemeClr val="accent1"/>
+          </a:effectRef>
+          <a:fontRef idx="minor">
+            <a:schemeClr val="lt1"/>
+          </a:fontRef>
+        </p:style>
+        <p:txBody>
+          <a:bodyPr rtlCol="0" anchor="ctr" wrap="square" lIns="19050" rIns="19050" tIns="19050" bIns="19050"/>
+          <a:lstStyle/>
+          <a:p>
+            <a:pPr algn="ctr">
+              <a:lnSpc>
+                <a:spcPct val="122000"/>
+              </a:lnSpc>
+            </a:pPr>
+            <a:r>
+              <a:rPr sz="1300" b="1">
+                <a:solidFill>
+                  <a:srgbClr val="F5F5F8"/>
+                </a:solidFill>
+                <a:latin typeface="Amazon Ember"/>
+                <a:ea typeface="メイリオ"/>
+                <a:cs typeface="メイリオ"/>
+              </a:rPr>
+              <a:t>compile</a:t>
             </a:r>
           </a:p>
         </p:txBody>
       </p:sp>
       <p:cxnSp>
         <p:nvCxnSpPr>
-          <p:cNvPr id="24" name="Connector 23"/>
+          <p:cNvPr id="13" name="Connector 12"/>
           <p:cNvCxnSpPr/>
           <p:nvPr/>
         </p:nvCxnSpPr>
         <p:spPr>
           <a:xfrm>
-            <a:off x="5886450" y="3848100"/>
-            <a:ext cx="0" cy="228600"/>
+            <a:off x="4171950" y="2286000"/>
+            <a:ext cx="0" cy="114300"/>
           </a:xfrm>
           <a:prstGeom prst="line">
             <a:avLst/>
@@ -15846,14 +15330,14 @@
       </p:cxnSp>
       <p:sp>
         <p:nvSpPr>
-          <p:cNvPr id="25" name="Rounded Rectangle 24"/>
-          <p:cNvSpPr/>
-          <p:nvPr/>
-        </p:nvSpPr>
-        <p:spPr>
-          <a:xfrm>
-            <a:off x="4124325" y="4076700"/>
-            <a:ext cx="3524250" cy="552450"/>
+          <p:cNvPr id="14" name="Rounded Rectangle 13"/>
+          <p:cNvSpPr/>
+          <p:nvPr/>
+        </p:nvSpPr>
+        <p:spPr>
+          <a:xfrm>
+            <a:off x="409575" y="2400300"/>
+            <a:ext cx="7524750" cy="552450"/>
           </a:xfrm>
           <a:prstGeom prst="roundRect">
             <a:avLst>
@@ -15861,11 +15345,141 @@
             </a:avLst>
           </a:prstGeom>
           <a:solidFill>
-            <a:srgbClr val="343840"/>
+            <a:srgbClr val="161A1E"/>
+          </a:solidFill>
+          <a:ln w="19050">
+            <a:solidFill>
+              <a:srgbClr val="2896F0"/>
+            </a:solidFill>
+          </a:ln>
+          <a:effectLst/>
+        </p:spPr>
+        <p:style>
+          <a:lnRef idx="1">
+            <a:schemeClr val="accent1"/>
+          </a:lnRef>
+          <a:fillRef idx="3">
+            <a:schemeClr val="accent1"/>
+          </a:fillRef>
+          <a:effectRef idx="2">
+            <a:schemeClr val="accent1"/>
+          </a:effectRef>
+          <a:fontRef idx="minor">
+            <a:schemeClr val="lt1"/>
+          </a:fontRef>
+        </p:style>
+        <p:txBody>
+          <a:bodyPr rtlCol="0" anchor="ctr"/>
+          <a:lstStyle/>
+          <a:p>
+            <a:pPr algn="ctr"/>
+          </a:p>
+        </p:txBody>
+      </p:sp>
+      <p:sp>
+        <p:nvSpPr>
+          <p:cNvPr id="15" name="TextBox 14"/>
+          <p:cNvSpPr txBox="1"/>
+          <p:nvPr/>
+        </p:nvSpPr>
+        <p:spPr>
+          <a:xfrm>
+            <a:off x="561975" y="2400300"/>
+            <a:ext cx="2857500" cy="552450"/>
+          </a:xfrm>
+          <a:prstGeom prst="rect">
+            <a:avLst/>
+          </a:prstGeom>
+          <a:noFill/>
+        </p:spPr>
+        <p:txBody>
+          <a:bodyPr wrap="square" lIns="0" rIns="0" tIns="0" bIns="0" anchor="ctr">
+            <a:spAutoFit/>
+          </a:bodyPr>
+          <a:lstStyle/>
+          <a:p>
+            <a:pPr algn="l">
+              <a:lnSpc>
+                <a:spcPct val="122000"/>
+              </a:lnSpc>
+            </a:pPr>
+            <a:r>
+              <a:rPr sz="1700" b="1">
+                <a:solidFill>
+                  <a:srgbClr val="F5F5F8"/>
+                </a:solidFill>
+                <a:latin typeface="Amazon Ember"/>
+                <a:ea typeface="メイリオ"/>
+                <a:cs typeface="メイリオ"/>
+              </a:rPr>
+              <a:t>Neuron Runtime</a:t>
+            </a:r>
+          </a:p>
+        </p:txBody>
+      </p:sp>
+      <p:sp>
+        <p:nvSpPr>
+          <p:cNvPr id="16" name="TextBox 15"/>
+          <p:cNvSpPr txBox="1"/>
+          <p:nvPr/>
+        </p:nvSpPr>
+        <p:spPr>
+          <a:xfrm>
+            <a:off x="3457575" y="2400300"/>
+            <a:ext cx="4381500" cy="552450"/>
+          </a:xfrm>
+          <a:prstGeom prst="rect">
+            <a:avLst/>
+          </a:prstGeom>
+          <a:noFill/>
+        </p:spPr>
+        <p:txBody>
+          <a:bodyPr wrap="square" lIns="0" rIns="0" tIns="0" bIns="0" anchor="ctr">
+            <a:spAutoFit/>
+          </a:bodyPr>
+          <a:lstStyle/>
+          <a:p>
+            <a:pPr algn="l">
+              <a:lnSpc>
+                <a:spcPct val="122000"/>
+              </a:lnSpc>
+            </a:pPr>
+            <a:r>
+              <a:rPr sz="1400" b="0">
+                <a:solidFill>
+                  <a:srgbClr val="96969E"/>
+                </a:solidFill>
+                <a:latin typeface="Amazon Ember"/>
+                <a:ea typeface="メイリオ"/>
+                <a:cs typeface="メイリオ"/>
+              </a:rPr>
+              <a:t>loads the NEFF, CC program and DMA rings</a:t>
+            </a:r>
+          </a:p>
+        </p:txBody>
+      </p:sp>
+      <p:sp>
+        <p:nvSpPr>
+          <p:cNvPr id="17" name="Rounded Rectangle 16"/>
+          <p:cNvSpPr/>
+          <p:nvPr/>
+        </p:nvSpPr>
+        <p:spPr>
+          <a:xfrm>
+            <a:off x="8124825" y="2514600"/>
+            <a:ext cx="1809750" cy="323850"/>
+          </a:xfrm>
+          <a:prstGeom prst="roundRect">
+            <a:avLst>
+              <a:gd name="adj" fmla="val 30000"/>
+            </a:avLst>
+          </a:prstGeom>
+          <a:solidFill>
+            <a:srgbClr val="102C48"/>
           </a:solidFill>
           <a:ln w="12700">
             <a:solidFill>
-              <a:srgbClr val="464A50"/>
+              <a:srgbClr val="2896F0"/>
             </a:solidFill>
           </a:ln>
           <a:effectLst/>
@@ -15889,6 +15503,362 @@
           <a:lstStyle/>
           <a:p>
             <a:pPr algn="ctr">
+              <a:lnSpc>
+                <a:spcPct val="122000"/>
+              </a:lnSpc>
+            </a:pPr>
+            <a:r>
+              <a:rPr sz="1300" b="1">
+                <a:solidFill>
+                  <a:srgbClr val="F5F5F8"/>
+                </a:solidFill>
+                <a:latin typeface="Amazon Ember"/>
+                <a:ea typeface="メイリオ"/>
+                <a:cs typeface="メイリオ"/>
+              </a:rPr>
+              <a:t>load + run</a:t>
+            </a:r>
+          </a:p>
+        </p:txBody>
+      </p:sp>
+      <p:cxnSp>
+        <p:nvCxnSpPr>
+          <p:cNvPr id="18" name="Connector 17"/>
+          <p:cNvCxnSpPr/>
+          <p:nvPr/>
+        </p:nvCxnSpPr>
+        <p:spPr>
+          <a:xfrm>
+            <a:off x="4171950" y="2952750"/>
+            <a:ext cx="0" cy="114300"/>
+          </a:xfrm>
+          <a:prstGeom prst="line">
+            <a:avLst/>
+          </a:prstGeom>
+          <a:ln w="19050">
+            <a:solidFill>
+              <a:srgbClr val="96969E"/>
+            </a:solidFill>
+            <a:tailEnd type="triangle" w="med" len="med"/>
+          </a:ln>
+          <a:effectLst/>
+        </p:spPr>
+        <p:style>
+          <a:lnRef idx="2">
+            <a:schemeClr val="accent1"/>
+          </a:lnRef>
+          <a:fillRef idx="0">
+            <a:schemeClr val="accent1"/>
+          </a:fillRef>
+          <a:effectRef idx="1">
+            <a:schemeClr val="accent1"/>
+          </a:effectRef>
+          <a:fontRef idx="minor">
+            <a:schemeClr val="tx1"/>
+          </a:fontRef>
+        </p:style>
+      </p:cxnSp>
+      <p:sp>
+        <p:nvSpPr>
+          <p:cNvPr id="19" name="Rounded Rectangle 18"/>
+          <p:cNvSpPr/>
+          <p:nvPr/>
+        </p:nvSpPr>
+        <p:spPr>
+          <a:xfrm>
+            <a:off x="409575" y="3067050"/>
+            <a:ext cx="7524750" cy="552450"/>
+          </a:xfrm>
+          <a:prstGeom prst="roundRect">
+            <a:avLst>
+              <a:gd name="adj" fmla="val 8000"/>
+            </a:avLst>
+          </a:prstGeom>
+          <a:solidFill>
+            <a:srgbClr val="161A1E"/>
+          </a:solidFill>
+          <a:ln w="19050">
+            <a:solidFill>
+              <a:srgbClr val="2896F0"/>
+            </a:solidFill>
+          </a:ln>
+          <a:effectLst/>
+        </p:spPr>
+        <p:style>
+          <a:lnRef idx="1">
+            <a:schemeClr val="accent1"/>
+          </a:lnRef>
+          <a:fillRef idx="3">
+            <a:schemeClr val="accent1"/>
+          </a:fillRef>
+          <a:effectRef idx="2">
+            <a:schemeClr val="accent1"/>
+          </a:effectRef>
+          <a:fontRef idx="minor">
+            <a:schemeClr val="lt1"/>
+          </a:fontRef>
+        </p:style>
+        <p:txBody>
+          <a:bodyPr rtlCol="0" anchor="ctr"/>
+          <a:lstStyle/>
+          <a:p>
+            <a:pPr algn="ctr"/>
+          </a:p>
+        </p:txBody>
+      </p:sp>
+      <p:sp>
+        <p:nvSpPr>
+          <p:cNvPr id="20" name="TextBox 19"/>
+          <p:cNvSpPr txBox="1"/>
+          <p:nvPr/>
+        </p:nvSpPr>
+        <p:spPr>
+          <a:xfrm>
+            <a:off x="561975" y="3067050"/>
+            <a:ext cx="2857500" cy="552450"/>
+          </a:xfrm>
+          <a:prstGeom prst="rect">
+            <a:avLst/>
+          </a:prstGeom>
+          <a:noFill/>
+        </p:spPr>
+        <p:txBody>
+          <a:bodyPr wrap="square" lIns="0" rIns="0" tIns="0" bIns="0" anchor="ctr">
+            <a:spAutoFit/>
+          </a:bodyPr>
+          <a:lstStyle/>
+          <a:p>
+            <a:pPr algn="l">
+              <a:lnSpc>
+                <a:spcPct val="122000"/>
+              </a:lnSpc>
+            </a:pPr>
+            <a:r>
+              <a:rPr sz="1700" b="1">
+                <a:solidFill>
+                  <a:srgbClr val="F5F5F8"/>
+                </a:solidFill>
+                <a:latin typeface="Amazon Ember"/>
+                <a:ea typeface="メイリオ"/>
+                <a:cs typeface="メイリオ"/>
+              </a:rPr>
+              <a:t>aws-neuronx-collectives</a:t>
+            </a:r>
+          </a:p>
+        </p:txBody>
+      </p:sp>
+      <p:sp>
+        <p:nvSpPr>
+          <p:cNvPr id="21" name="TextBox 20"/>
+          <p:cNvSpPr txBox="1"/>
+          <p:nvPr/>
+        </p:nvSpPr>
+        <p:spPr>
+          <a:xfrm>
+            <a:off x="3457575" y="3067050"/>
+            <a:ext cx="4381500" cy="552450"/>
+          </a:xfrm>
+          <a:prstGeom prst="rect">
+            <a:avLst/>
+          </a:prstGeom>
+          <a:noFill/>
+        </p:spPr>
+        <p:txBody>
+          <a:bodyPr wrap="square" lIns="0" rIns="0" tIns="0" bIns="0" anchor="ctr">
+            <a:spAutoFit/>
+          </a:bodyPr>
+          <a:lstStyle/>
+          <a:p>
+            <a:pPr algn="l">
+              <a:lnSpc>
+                <a:spcPct val="122000"/>
+              </a:lnSpc>
+            </a:pPr>
+            <a:r>
+              <a:rPr sz="1400" b="0">
+                <a:solidFill>
+                  <a:srgbClr val="96969E"/>
+                </a:solidFill>
+                <a:latin typeface="Amazon Ember"/>
+                <a:ea typeface="メイリオ"/>
+                <a:cs typeface="メイリオ"/>
+              </a:rPr>
+              <a:t>implements Ring / Mesh / RDH / KangaRing</a:t>
+            </a:r>
+          </a:p>
+        </p:txBody>
+      </p:sp>
+      <p:sp>
+        <p:nvSpPr>
+          <p:cNvPr id="22" name="Rounded Rectangle 21"/>
+          <p:cNvSpPr/>
+          <p:nvPr/>
+        </p:nvSpPr>
+        <p:spPr>
+          <a:xfrm>
+            <a:off x="8124825" y="3181350"/>
+            <a:ext cx="1809750" cy="323850"/>
+          </a:xfrm>
+          <a:prstGeom prst="roundRect">
+            <a:avLst>
+              <a:gd name="adj" fmla="val 30000"/>
+            </a:avLst>
+          </a:prstGeom>
+          <a:solidFill>
+            <a:srgbClr val="102C48"/>
+          </a:solidFill>
+          <a:ln w="12700">
+            <a:solidFill>
+              <a:srgbClr val="2896F0"/>
+            </a:solidFill>
+          </a:ln>
+          <a:effectLst/>
+        </p:spPr>
+        <p:style>
+          <a:lnRef idx="1">
+            <a:schemeClr val="accent1"/>
+          </a:lnRef>
+          <a:fillRef idx="3">
+            <a:schemeClr val="accent1"/>
+          </a:fillRef>
+          <a:effectRef idx="2">
+            <a:schemeClr val="accent1"/>
+          </a:effectRef>
+          <a:fontRef idx="minor">
+            <a:schemeClr val="lt1"/>
+          </a:fontRef>
+        </p:style>
+        <p:txBody>
+          <a:bodyPr rtlCol="0" anchor="ctr" wrap="square" lIns="19050" rIns="19050" tIns="19050" bIns="19050"/>
+          <a:lstStyle/>
+          <a:p>
+            <a:pPr algn="ctr">
+              <a:lnSpc>
+                <a:spcPct val="122000"/>
+              </a:lnSpc>
+            </a:pPr>
+            <a:r>
+              <a:rPr sz="1300" b="1">
+                <a:solidFill>
+                  <a:srgbClr val="F5F5F8"/>
+                </a:solidFill>
+                <a:latin typeface="Amazon Ember"/>
+                <a:ea typeface="メイリオ"/>
+                <a:cs typeface="メイリオ"/>
+              </a:rPr>
+              <a:t>using a collective</a:t>
+            </a:r>
+          </a:p>
+        </p:txBody>
+      </p:sp>
+      <p:cxnSp>
+        <p:nvCxnSpPr>
+          <p:cNvPr id="23" name="Connector 22"/>
+          <p:cNvCxnSpPr/>
+          <p:nvPr/>
+        </p:nvCxnSpPr>
+        <p:spPr>
+          <a:xfrm>
+            <a:off x="4171950" y="3619500"/>
+            <a:ext cx="0" cy="114300"/>
+          </a:xfrm>
+          <a:prstGeom prst="line">
+            <a:avLst/>
+          </a:prstGeom>
+          <a:ln w="19050">
+            <a:solidFill>
+              <a:srgbClr val="96969E"/>
+            </a:solidFill>
+            <a:tailEnd type="triangle" w="med" len="med"/>
+          </a:ln>
+          <a:effectLst/>
+        </p:spPr>
+        <p:style>
+          <a:lnRef idx="2">
+            <a:schemeClr val="accent1"/>
+          </a:lnRef>
+          <a:fillRef idx="0">
+            <a:schemeClr val="accent1"/>
+          </a:fillRef>
+          <a:effectRef idx="1">
+            <a:schemeClr val="accent1"/>
+          </a:effectRef>
+          <a:fontRef idx="minor">
+            <a:schemeClr val="tx1"/>
+          </a:fontRef>
+        </p:style>
+      </p:cxnSp>
+      <p:sp>
+        <p:nvSpPr>
+          <p:cNvPr id="24" name="Rounded Rectangle 23"/>
+          <p:cNvSpPr/>
+          <p:nvPr/>
+        </p:nvSpPr>
+        <p:spPr>
+          <a:xfrm>
+            <a:off x="409575" y="3733800"/>
+            <a:ext cx="3667125" cy="590550"/>
+          </a:xfrm>
+          <a:prstGeom prst="roundRect">
+            <a:avLst>
+              <a:gd name="adj" fmla="val 8000"/>
+            </a:avLst>
+          </a:prstGeom>
+          <a:solidFill>
+            <a:srgbClr val="161A1E"/>
+          </a:solidFill>
+          <a:ln w="19050">
+            <a:solidFill>
+              <a:srgbClr val="343840"/>
+            </a:solidFill>
+          </a:ln>
+          <a:effectLst/>
+        </p:spPr>
+        <p:style>
+          <a:lnRef idx="1">
+            <a:schemeClr val="accent1"/>
+          </a:lnRef>
+          <a:fillRef idx="3">
+            <a:schemeClr val="accent1"/>
+          </a:fillRef>
+          <a:effectRef idx="2">
+            <a:schemeClr val="accent1"/>
+          </a:effectRef>
+          <a:fontRef idx="minor">
+            <a:schemeClr val="lt1"/>
+          </a:fontRef>
+        </p:style>
+        <p:txBody>
+          <a:bodyPr rtlCol="0" anchor="ctr"/>
+          <a:lstStyle/>
+          <a:p>
+            <a:pPr algn="ctr"/>
+          </a:p>
+        </p:txBody>
+      </p:sp>
+      <p:sp>
+        <p:nvSpPr>
+          <p:cNvPr id="25" name="TextBox 24"/>
+          <p:cNvSpPr txBox="1"/>
+          <p:nvPr/>
+        </p:nvSpPr>
+        <p:spPr>
+          <a:xfrm>
+            <a:off x="542925" y="3771900"/>
+            <a:ext cx="3476625" cy="285750"/>
+          </a:xfrm>
+          <a:prstGeom prst="rect">
+            <a:avLst/>
+          </a:prstGeom>
+          <a:noFill/>
+        </p:spPr>
+        <p:txBody>
+          <a:bodyPr wrap="square" lIns="0" rIns="0" tIns="0" bIns="0" anchor="ctr">
+            <a:spAutoFit/>
+          </a:bodyPr>
+          <a:lstStyle/>
+          <a:p>
+            <a:pPr algn="l">
               <a:lnSpc>
                 <a:spcPct val="122000"/>
               </a:lnSpc>
@@ -15902,84 +15872,21 @@
                 <a:ea typeface="メイリオ"/>
                 <a:cs typeface="メイリオ"/>
               </a:rPr>
-              <a:t>EFA network interface</a:t>
+              <a:t>aws-neuronx-dkms</a:t>
             </a:r>
           </a:p>
         </p:txBody>
       </p:sp>
       <p:sp>
         <p:nvSpPr>
-          <p:cNvPr id="26" name="Rounded Rectangle 25"/>
-          <p:cNvSpPr/>
-          <p:nvPr/>
-        </p:nvSpPr>
-        <p:spPr>
-          <a:xfrm>
-            <a:off x="7877175" y="3371850"/>
-            <a:ext cx="1905000" cy="361950"/>
-          </a:xfrm>
-          <a:prstGeom prst="roundRect">
-            <a:avLst>
-              <a:gd name="adj" fmla="val 30000"/>
-            </a:avLst>
-          </a:prstGeom>
-          <a:solidFill>
-            <a:srgbClr val="102C48"/>
-          </a:solidFill>
-          <a:ln w="12700">
-            <a:solidFill>
-              <a:srgbClr val="2896F0"/>
-            </a:solidFill>
-          </a:ln>
-          <a:effectLst/>
-        </p:spPr>
-        <p:style>
-          <a:lnRef idx="1">
-            <a:schemeClr val="accent1"/>
-          </a:lnRef>
-          <a:fillRef idx="3">
-            <a:schemeClr val="accent1"/>
-          </a:fillRef>
-          <a:effectRef idx="2">
-            <a:schemeClr val="accent1"/>
-          </a:effectRef>
-          <a:fontRef idx="minor">
-            <a:schemeClr val="lt1"/>
-          </a:fontRef>
-        </p:style>
-        <p:txBody>
-          <a:bodyPr rtlCol="0" anchor="ctr" wrap="square" lIns="19050" rIns="19050" tIns="19050" bIns="19050"/>
-          <a:lstStyle/>
-          <a:p>
-            <a:pPr algn="ctr">
-              <a:lnSpc>
-                <a:spcPct val="122000"/>
-              </a:lnSpc>
-            </a:pPr>
-            <a:r>
-              <a:rPr sz="1400" b="1">
-                <a:solidFill>
-                  <a:srgbClr val="F5F5F8"/>
-                </a:solidFill>
-                <a:latin typeface="Amazon Ember"/>
-                <a:ea typeface="メイリオ"/>
-                <a:cs typeface="メイリオ"/>
-              </a:rPr>
-              <a:t>apt  2.30.2</a:t>
-            </a:r>
-          </a:p>
-        </p:txBody>
-      </p:sp>
-      <p:sp>
-        <p:nvSpPr>
-          <p:cNvPr id="27" name="TextBox 26"/>
+          <p:cNvPr id="26" name="TextBox 25"/>
           <p:cNvSpPr txBox="1"/>
           <p:nvPr/>
         </p:nvSpPr>
         <p:spPr>
           <a:xfrm>
-            <a:off x="7877175" y="3771900"/>
-            <a:ext cx="1905000" cy="285750"/>
+            <a:off x="542925" y="4038600"/>
+            <a:ext cx="3476625" cy="247650"/>
           </a:xfrm>
           <a:prstGeom prst="rect">
             <a:avLst/>
@@ -15992,7 +15899,7 @@
           </a:bodyPr>
           <a:lstStyle/>
           <a:p>
-            <a:pPr algn="ctr">
+            <a:pPr algn="l">
               <a:lnSpc>
                 <a:spcPct val="122000"/>
               </a:lnSpc>
@@ -16006,31 +15913,90 @@
                 <a:ea typeface="メイリオ"/>
                 <a:cs typeface="メイリオ"/>
               </a:rPr>
-              <a:t>EFA installer</a:t>
+              <a:t>driver for the Neuron devices  (kernel)</a:t>
             </a:r>
           </a:p>
         </p:txBody>
       </p:sp>
-      <p:sp>
-        <p:nvSpPr>
-          <p:cNvPr id="28" name="TextBox 27"/>
-          <p:cNvSpPr txBox="1"/>
-          <p:nvPr/>
-        </p:nvSpPr>
-        <p:spPr>
-          <a:xfrm>
-            <a:off x="7877175" y="4171950"/>
-            <a:ext cx="1905000" cy="381000"/>
-          </a:xfrm>
-          <a:prstGeom prst="rect">
+      <p:cxnSp>
+        <p:nvCxnSpPr>
+          <p:cNvPr id="27" name="Connector 26"/>
+          <p:cNvCxnSpPr/>
+          <p:nvPr/>
+        </p:nvCxnSpPr>
+        <p:spPr>
+          <a:xfrm>
+            <a:off x="2243138" y="4324350"/>
+            <a:ext cx="0" cy="209550"/>
+          </a:xfrm>
+          <a:prstGeom prst="line">
             <a:avLst/>
           </a:prstGeom>
-          <a:noFill/>
-        </p:spPr>
-        <p:txBody>
-          <a:bodyPr wrap="square" lIns="0" rIns="0" tIns="0" bIns="0" anchor="ctr">
-            <a:spAutoFit/>
-          </a:bodyPr>
+          <a:ln w="19050">
+            <a:solidFill>
+              <a:srgbClr val="96969E"/>
+            </a:solidFill>
+            <a:tailEnd type="triangle" w="med" len="med"/>
+          </a:ln>
+          <a:effectLst/>
+        </p:spPr>
+        <p:style>
+          <a:lnRef idx="2">
+            <a:schemeClr val="accent1"/>
+          </a:lnRef>
+          <a:fillRef idx="0">
+            <a:schemeClr val="accent1"/>
+          </a:fillRef>
+          <a:effectRef idx="1">
+            <a:schemeClr val="accent1"/>
+          </a:effectRef>
+          <a:fontRef idx="minor">
+            <a:schemeClr val="tx1"/>
+          </a:fontRef>
+        </p:style>
+      </p:cxnSp>
+      <p:sp>
+        <p:nvSpPr>
+          <p:cNvPr id="28" name="Rounded Rectangle 27"/>
+          <p:cNvSpPr/>
+          <p:nvPr/>
+        </p:nvSpPr>
+        <p:spPr>
+          <a:xfrm>
+            <a:off x="409575" y="4533900"/>
+            <a:ext cx="3667125" cy="514350"/>
+          </a:xfrm>
+          <a:prstGeom prst="roundRect">
+            <a:avLst>
+              <a:gd name="adj" fmla="val 8000"/>
+            </a:avLst>
+          </a:prstGeom>
+          <a:solidFill>
+            <a:srgbClr val="124022"/>
+          </a:solidFill>
+          <a:ln w="12700">
+            <a:solidFill>
+              <a:srgbClr val="24A046"/>
+            </a:solidFill>
+          </a:ln>
+          <a:effectLst/>
+        </p:spPr>
+        <p:style>
+          <a:lnRef idx="1">
+            <a:schemeClr val="accent1"/>
+          </a:lnRef>
+          <a:fillRef idx="3">
+            <a:schemeClr val="accent1"/>
+          </a:fillRef>
+          <a:effectRef idx="2">
+            <a:schemeClr val="accent1"/>
+          </a:effectRef>
+          <a:fontRef idx="minor">
+            <a:schemeClr val="lt1"/>
+          </a:fontRef>
+        </p:style>
+        <p:txBody>
+          <a:bodyPr rtlCol="0" anchor="ctr" wrap="square" lIns="19050" rIns="19050" tIns="19050" bIns="19050"/>
           <a:lstStyle/>
           <a:p>
             <a:pPr algn="ctr">
@@ -16039,7 +16005,137 @@
               </a:lnSpc>
             </a:pPr>
             <a:r>
-              <a:rPr sz="1400" b="0">
+              <a:rPr sz="1500" b="1">
+                <a:solidFill>
+                  <a:srgbClr val="F5F5F8"/>
+                </a:solidFill>
+                <a:latin typeface="Amazon Ember"/>
+                <a:ea typeface="メイリオ"/>
+                <a:cs typeface="メイリオ"/>
+              </a:rPr>
+              <a:t>CC-Cores + DMA over NeuronLink</a:t>
+            </a:r>
+          </a:p>
+        </p:txBody>
+      </p:sp>
+      <p:sp>
+        <p:nvSpPr>
+          <p:cNvPr id="29" name="Rounded Rectangle 28"/>
+          <p:cNvSpPr/>
+          <p:nvPr/>
+        </p:nvSpPr>
+        <p:spPr>
+          <a:xfrm>
+            <a:off x="4267200" y="3733800"/>
+            <a:ext cx="3667125" cy="590550"/>
+          </a:xfrm>
+          <a:prstGeom prst="roundRect">
+            <a:avLst>
+              <a:gd name="adj" fmla="val 8000"/>
+            </a:avLst>
+          </a:prstGeom>
+          <a:solidFill>
+            <a:srgbClr val="161A1E"/>
+          </a:solidFill>
+          <a:ln w="19050">
+            <a:solidFill>
+              <a:srgbClr val="343840"/>
+            </a:solidFill>
+          </a:ln>
+          <a:effectLst/>
+        </p:spPr>
+        <p:style>
+          <a:lnRef idx="1">
+            <a:schemeClr val="accent1"/>
+          </a:lnRef>
+          <a:fillRef idx="3">
+            <a:schemeClr val="accent1"/>
+          </a:fillRef>
+          <a:effectRef idx="2">
+            <a:schemeClr val="accent1"/>
+          </a:effectRef>
+          <a:fontRef idx="minor">
+            <a:schemeClr val="lt1"/>
+          </a:fontRef>
+        </p:style>
+        <p:txBody>
+          <a:bodyPr rtlCol="0" anchor="ctr"/>
+          <a:lstStyle/>
+          <a:p>
+            <a:pPr algn="ctr"/>
+          </a:p>
+        </p:txBody>
+      </p:sp>
+      <p:sp>
+        <p:nvSpPr>
+          <p:cNvPr id="30" name="TextBox 29"/>
+          <p:cNvSpPr txBox="1"/>
+          <p:nvPr/>
+        </p:nvSpPr>
+        <p:spPr>
+          <a:xfrm>
+            <a:off x="4400550" y="3771900"/>
+            <a:ext cx="3476625" cy="285750"/>
+          </a:xfrm>
+          <a:prstGeom prst="rect">
+            <a:avLst/>
+          </a:prstGeom>
+          <a:noFill/>
+        </p:spPr>
+        <p:txBody>
+          <a:bodyPr wrap="square" lIns="0" rIns="0" tIns="0" bIns="0" anchor="ctr">
+            <a:spAutoFit/>
+          </a:bodyPr>
+          <a:lstStyle/>
+          <a:p>
+            <a:pPr algn="l">
+              <a:lnSpc>
+                <a:spcPct val="122000"/>
+              </a:lnSpc>
+            </a:pPr>
+            <a:r>
+              <a:rPr sz="1600" b="1">
+                <a:solidFill>
+                  <a:srgbClr val="F5F5F8"/>
+                </a:solidFill>
+                <a:latin typeface="Amazon Ember"/>
+                <a:ea typeface="メイリオ"/>
+                <a:cs typeface="メイリオ"/>
+              </a:rPr>
+              <a:t>EFA software</a:t>
+            </a:r>
+          </a:p>
+        </p:txBody>
+      </p:sp>
+      <p:sp>
+        <p:nvSpPr>
+          <p:cNvPr id="31" name="TextBox 30"/>
+          <p:cNvSpPr txBox="1"/>
+          <p:nvPr/>
+        </p:nvSpPr>
+        <p:spPr>
+          <a:xfrm>
+            <a:off x="4400550" y="4038600"/>
+            <a:ext cx="3476625" cy="247650"/>
+          </a:xfrm>
+          <a:prstGeom prst="rect">
+            <a:avLst/>
+          </a:prstGeom>
+          <a:noFill/>
+        </p:spPr>
+        <p:txBody>
+          <a:bodyPr wrap="square" lIns="0" rIns="0" tIns="0" bIns="0" anchor="ctr">
+            <a:spAutoFit/>
+          </a:bodyPr>
+          <a:lstStyle/>
+          <a:p>
+            <a:pPr algn="l">
+              <a:lnSpc>
+                <a:spcPct val="122000"/>
+              </a:lnSpc>
+            </a:pPr>
+            <a:r>
+              <a:rPr sz="1200" b="0">
                 <a:solidFill>
                   <a:srgbClr val="96969E"/>
                 </a:solidFill>
@@ -16047,21 +16143,121 @@
                 <a:ea typeface="メイリオ"/>
                 <a:cs typeface="メイリオ"/>
               </a:rPr>
-              <a:t>hardware</a:t>
+              <a:t>libfabric + rdma-core + driver  (multi-instance)</a:t>
             </a:r>
           </a:p>
         </p:txBody>
       </p:sp>
-      <p:sp>
-        <p:nvSpPr>
-          <p:cNvPr id="29" name="TextBox 28"/>
+      <p:cxnSp>
+        <p:nvCxnSpPr>
+          <p:cNvPr id="32" name="Connector 31"/>
+          <p:cNvCxnSpPr/>
+          <p:nvPr/>
+        </p:nvCxnSpPr>
+        <p:spPr>
+          <a:xfrm>
+            <a:off x="6100762" y="4324350"/>
+            <a:ext cx="0" cy="209550"/>
+          </a:xfrm>
+          <a:prstGeom prst="line">
+            <a:avLst/>
+          </a:prstGeom>
+          <a:ln w="19050">
+            <a:solidFill>
+              <a:srgbClr val="96969E"/>
+            </a:solidFill>
+            <a:tailEnd type="triangle" w="med" len="med"/>
+          </a:ln>
+          <a:effectLst/>
+        </p:spPr>
+        <p:style>
+          <a:lnRef idx="2">
+            <a:schemeClr val="accent1"/>
+          </a:lnRef>
+          <a:fillRef idx="0">
+            <a:schemeClr val="accent1"/>
+          </a:fillRef>
+          <a:effectRef idx="1">
+            <a:schemeClr val="accent1"/>
+          </a:effectRef>
+          <a:fontRef idx="minor">
+            <a:schemeClr val="tx1"/>
+          </a:fontRef>
+        </p:style>
+      </p:cxnSp>
+      <p:sp>
+        <p:nvSpPr>
+          <p:cNvPr id="33" name="Rounded Rectangle 32"/>
+          <p:cNvSpPr/>
+          <p:nvPr/>
+        </p:nvSpPr>
+        <p:spPr>
+          <a:xfrm>
+            <a:off x="4267200" y="4533900"/>
+            <a:ext cx="3667125" cy="514350"/>
+          </a:xfrm>
+          <a:prstGeom prst="roundRect">
+            <a:avLst>
+              <a:gd name="adj" fmla="val 8000"/>
+            </a:avLst>
+          </a:prstGeom>
+          <a:solidFill>
+            <a:srgbClr val="343840"/>
+          </a:solidFill>
+          <a:ln w="12700">
+            <a:solidFill>
+              <a:srgbClr val="464A50"/>
+            </a:solidFill>
+          </a:ln>
+          <a:effectLst/>
+        </p:spPr>
+        <p:style>
+          <a:lnRef idx="1">
+            <a:schemeClr val="accent1"/>
+          </a:lnRef>
+          <a:fillRef idx="3">
+            <a:schemeClr val="accent1"/>
+          </a:fillRef>
+          <a:effectRef idx="2">
+            <a:schemeClr val="accent1"/>
+          </a:effectRef>
+          <a:fontRef idx="minor">
+            <a:schemeClr val="lt1"/>
+          </a:fontRef>
+        </p:style>
+        <p:txBody>
+          <a:bodyPr rtlCol="0" anchor="ctr" wrap="square" lIns="19050" rIns="19050" tIns="19050" bIns="19050"/>
+          <a:lstStyle/>
+          <a:p>
+            <a:pPr algn="ctr">
+              <a:lnSpc>
+                <a:spcPct val="122000"/>
+              </a:lnSpc>
+            </a:pPr>
+            <a:r>
+              <a:rPr sz="1500" b="1">
+                <a:solidFill>
+                  <a:srgbClr val="F5F5F8"/>
+                </a:solidFill>
+                <a:latin typeface="Amazon Ember"/>
+                <a:ea typeface="メイリオ"/>
+                <a:cs typeface="メイリオ"/>
+              </a:rPr>
+              <a:t>EFA network interface</a:t>
+            </a:r>
+          </a:p>
+        </p:txBody>
+      </p:sp>
+      <p:sp>
+        <p:nvSpPr>
+          <p:cNvPr id="34" name="TextBox 33"/>
           <p:cNvSpPr txBox="1"/>
           <p:nvPr/>
         </p:nvSpPr>
         <p:spPr>
           <a:xfrm>
-            <a:off x="409575" y="4686300"/>
-            <a:ext cx="3524250" cy="247650"/>
+            <a:off x="409575" y="5086350"/>
+            <a:ext cx="3667125" cy="247650"/>
           </a:xfrm>
           <a:prstGeom prst="rect">
             <a:avLst/>
@@ -16095,14 +16291,14 @@
       </p:sp>
       <p:sp>
         <p:nvSpPr>
-          <p:cNvPr id="30" name="TextBox 29"/>
+          <p:cNvPr id="35" name="TextBox 34"/>
           <p:cNvSpPr txBox="1"/>
           <p:nvPr/>
         </p:nvSpPr>
         <p:spPr>
           <a:xfrm>
-            <a:off x="4124325" y="4686300"/>
-            <a:ext cx="3524250" cy="247650"/>
+            <a:off x="4267200" y="5086350"/>
+            <a:ext cx="3667125" cy="247650"/>
           </a:xfrm>
           <a:prstGeom prst="rect">
             <a:avLst/>
@@ -16136,18 +16332,18 @@
       </p:sp>
       <p:sp>
         <p:nvSpPr>
-          <p:cNvPr id="31" name="Rounded Rectangle 30"/>
-          <p:cNvSpPr/>
-          <p:nvPr/>
-        </p:nvSpPr>
-        <p:spPr>
-          <a:xfrm>
-            <a:off x="10048875" y="1143000"/>
-            <a:ext cx="1714500" cy="2000250"/>
+          <p:cNvPr id="36" name="Rounded Rectangle 35"/>
+          <p:cNvSpPr/>
+          <p:nvPr/>
+        </p:nvSpPr>
+        <p:spPr>
+          <a:xfrm>
+            <a:off x="8124825" y="3867150"/>
+            <a:ext cx="1809750" cy="1181100"/>
           </a:xfrm>
           <a:prstGeom prst="roundRect">
             <a:avLst>
-              <a:gd name="adj" fmla="val 6000"/>
+              <a:gd name="adj" fmla="val 10000"/>
             </a:avLst>
           </a:prstGeom>
           <a:noFill/>
@@ -16227,25 +16423,7 @@
                 <a:ea typeface="メイリオ"/>
                 <a:cs typeface="メイリオ"/>
               </a:rPr>
-              <a:t>neuron-ls</a:t>
-            </a:r>
-          </a:p>
-          <a:p>
-            <a:pPr algn="ctr">
-              <a:lnSpc>
-                <a:spcPct val="122000"/>
-              </a:lnSpc>
-            </a:pPr>
-            <a:r>
-              <a:rPr sz="1300" b="1">
-                <a:solidFill>
-                  <a:srgbClr val="96969E"/>
-                </a:solidFill>
-                <a:latin typeface="Amazon Ember"/>
-                <a:ea typeface="メイリオ"/>
-                <a:cs typeface="メイリオ"/>
-              </a:rPr>
-              <a:t>nccom-test</a:t>
+              <a:t>check and measure</a:t>
             </a:r>
           </a:p>
         </p:txBody>
